--- a/powerpoints/Pokerbot_Upgrade_Week1.pptx
+++ b/powerpoints/Pokerbot_Upgrade_Week1.pptx
@@ -4598,8 +4598,14 @@
               </a:defRPr>
             </a:pPr>
             <a:r>
-              <a:t>⏱️ Tijdverdeling</a:t>
-            </a:r>
+              <a:rPr dirty="0"/>
+              <a:t>⏱️ </a:t>
+            </a:r>
+            <a:r>
+              <a:rPr dirty="0" err="1"/>
+              <a:t>Tijdverdeling</a:t>
+            </a:r>
+            <a:endParaRPr dirty="0"/>
           </a:p>
           <a:p>
             <a:pPr>
@@ -4613,7 +4619,24 @@
               </a:defRPr>
             </a:pPr>
             <a:r>
-              <a:t>• 15 min (Klassikaal nu)</a:t>
+              <a:rPr dirty="0"/>
+              <a:t>• 1</a:t>
+            </a:r>
+            <a:r>
+              <a:rPr lang="nl-NL" dirty="0"/>
+              <a:t>0</a:t>
+            </a:r>
+            <a:r>
+              <a:rPr dirty="0"/>
+              <a:t> min (</a:t>
+            </a:r>
+            <a:r>
+              <a:rPr dirty="0" err="1"/>
+              <a:t>Klassikaal</a:t>
+            </a:r>
+            <a:r>
+              <a:rPr dirty="0"/>
+              <a:t> nu)</a:t>
             </a:r>
           </a:p>
           <a:p>
@@ -4625,7 +4648,40 @@
               </a:defRPr>
             </a:pPr>
             <a:r>
-              <a:t>   Concepten bespreken: simulaties, bot-functies &amp; visual hierarchy.</a:t>
+              <a:rPr dirty="0"/>
+              <a:t>   </a:t>
+            </a:r>
+            <a:r>
+              <a:rPr dirty="0" err="1"/>
+              <a:t>Concepten</a:t>
+            </a:r>
+            <a:r>
+              <a:rPr dirty="0"/>
+              <a:t> </a:t>
+            </a:r>
+            <a:r>
+              <a:rPr dirty="0" err="1"/>
+              <a:t>bespreken</a:t>
+            </a:r>
+            <a:r>
+              <a:rPr dirty="0"/>
+              <a:t>: </a:t>
+            </a:r>
+            <a:r>
+              <a:rPr dirty="0" err="1"/>
+              <a:t>simulaties</a:t>
+            </a:r>
+            <a:r>
+              <a:rPr dirty="0"/>
+              <a:t>, bot-</a:t>
+            </a:r>
+            <a:r>
+              <a:rPr dirty="0" err="1"/>
+              <a:t>functies</a:t>
+            </a:r>
+            <a:r>
+              <a:rPr dirty="0"/>
+              <a:t> &amp; visual hierarchy.</a:t>
             </a:r>
           </a:p>
           <a:p>
@@ -4640,7 +4696,24 @@
               </a:defRPr>
             </a:pPr>
             <a:r>
-              <a:t>• 35 min (Zelf aan de slag)</a:t>
+              <a:rPr dirty="0"/>
+              <a:t>• 35 min (</a:t>
+            </a:r>
+            <a:r>
+              <a:rPr dirty="0" err="1"/>
+              <a:t>Zelf</a:t>
+            </a:r>
+            <a:r>
+              <a:rPr dirty="0"/>
+              <a:t> </a:t>
+            </a:r>
+            <a:r>
+              <a:rPr dirty="0" err="1"/>
+              <a:t>aan</a:t>
+            </a:r>
+            <a:r>
+              <a:rPr dirty="0"/>
+              <a:t> de slag)</a:t>
             </a:r>
           </a:p>
           <a:p>
@@ -4652,7 +4725,40 @@
               </a:defRPr>
             </a:pPr>
             <a:r>
-              <a:t>   Starten in het Jupyter Notebook en je bot-functie schrijven.</a:t>
+              <a:rPr dirty="0"/>
+              <a:t>   </a:t>
+            </a:r>
+            <a:r>
+              <a:rPr dirty="0" err="1"/>
+              <a:t>Starten</a:t>
+            </a:r>
+            <a:r>
+              <a:rPr dirty="0"/>
+              <a:t> in het Jupyter Notebook </a:t>
+            </a:r>
+            <a:r>
+              <a:rPr dirty="0" err="1"/>
+              <a:t>en</a:t>
+            </a:r>
+            <a:r>
+              <a:rPr dirty="0"/>
+              <a:t> je bot-</a:t>
+            </a:r>
+            <a:r>
+              <a:rPr dirty="0" err="1"/>
+              <a:t>functie</a:t>
+            </a:r>
+            <a:r>
+              <a:rPr dirty="0"/>
+              <a:t> </a:t>
+            </a:r>
+            <a:r>
+              <a:rPr dirty="0" err="1"/>
+              <a:t>schrijven</a:t>
+            </a:r>
+            <a:r>
+              <a:rPr dirty="0"/>
+              <a:t>.</a:t>
             </a:r>
           </a:p>
           <a:p>
@@ -4667,7 +4773,32 @@
               </a:defRPr>
             </a:pPr>
             <a:r>
-              <a:t>• Huiswerk (tot wo 13:40)</a:t>
+              <a:rPr dirty="0"/>
+              <a:t>• </a:t>
+            </a:r>
+            <a:r>
+              <a:rPr dirty="0" err="1"/>
+              <a:t>Huiswerk</a:t>
+            </a:r>
+            <a:r>
+              <a:rPr dirty="0"/>
+              <a:t> (tot wo 1</a:t>
+            </a:r>
+            <a:r>
+              <a:rPr lang="nl-NL" dirty="0"/>
+              <a:t>0</a:t>
+            </a:r>
+            <a:r>
+              <a:rPr dirty="0"/>
+              <a:t>:</a:t>
+            </a:r>
+            <a:r>
+              <a:rPr lang="nl-NL" dirty="0"/>
+              <a:t>0</a:t>
+            </a:r>
+            <a:r>
+              <a:rPr dirty="0"/>
+              <a:t>0)</a:t>
             </a:r>
           </a:p>
           <a:p>
@@ -4679,7 +4810,48 @@
               </a:defRPr>
             </a:pPr>
             <a:r>
-              <a:t>   Afronden, visualisatie polijsten en inleveren via de API.</a:t>
+              <a:rPr dirty="0"/>
+              <a:t>   </a:t>
+            </a:r>
+            <a:r>
+              <a:rPr dirty="0" err="1"/>
+              <a:t>Afronden</a:t>
+            </a:r>
+            <a:r>
+              <a:rPr dirty="0"/>
+              <a:t>, </a:t>
+            </a:r>
+            <a:r>
+              <a:rPr dirty="0" err="1"/>
+              <a:t>visualisatie</a:t>
+            </a:r>
+            <a:r>
+              <a:rPr dirty="0"/>
+              <a:t> </a:t>
+            </a:r>
+            <a:r>
+              <a:rPr dirty="0" err="1"/>
+              <a:t>polijsten</a:t>
+            </a:r>
+            <a:r>
+              <a:rPr dirty="0"/>
+              <a:t> </a:t>
+            </a:r>
+            <a:r>
+              <a:rPr dirty="0" err="1"/>
+              <a:t>en</a:t>
+            </a:r>
+            <a:r>
+              <a:rPr dirty="0"/>
+              <a:t> </a:t>
+            </a:r>
+            <a:r>
+              <a:rPr dirty="0" err="1"/>
+              <a:t>inleveren</a:t>
+            </a:r>
+            <a:r>
+              <a:rPr dirty="0"/>
+              <a:t> via de API.</a:t>
             </a:r>
           </a:p>
         </p:txBody>
@@ -6006,7 +6178,16 @@
               </a:defRPr>
             </a:pPr>
             <a:r>
-              <a:t>🚀 2. De Automatische API Check</a:t>
+              <a:rPr dirty="0"/>
+              <a:t>🚀 2. De </a:t>
+            </a:r>
+            <a:r>
+              <a:rPr dirty="0" err="1"/>
+              <a:t>Automatische</a:t>
+            </a:r>
+            <a:r>
+              <a:rPr dirty="0"/>
+              <a:t> API Check</a:t>
             </a:r>
           </a:p>
           <a:p>
@@ -6021,29 +6202,185 @@
               </a:defRPr>
             </a:pPr>
             <a:r>
-              <a:t>• Voer de inlever-cel onderaan je notebook uit.</a:t>
-            </a:r>
-            <a:br/>
-            <a:br/>
-            <a:r>
+              <a:rPr dirty="0"/>
+              <a:t>• </a:t>
+            </a:r>
+            <a:r>
+              <a:rPr dirty="0" err="1"/>
+              <a:t>Voer</a:t>
+            </a:r>
+            <a:r>
+              <a:rPr dirty="0"/>
+              <a:t> de </a:t>
+            </a:r>
+            <a:r>
+              <a:rPr dirty="0" err="1"/>
+              <a:t>inlever</a:t>
+            </a:r>
+            <a:r>
+              <a:rPr dirty="0"/>
+              <a:t>-cel </a:t>
+            </a:r>
+            <a:r>
+              <a:rPr dirty="0" err="1"/>
+              <a:t>onderaan</a:t>
+            </a:r>
+            <a:r>
+              <a:rPr dirty="0"/>
+              <a:t> je notebook </a:t>
+            </a:r>
+            <a:r>
+              <a:rPr dirty="0" err="1"/>
+              <a:t>uit</a:t>
+            </a:r>
+            <a:r>
+              <a:rPr dirty="0"/>
+              <a:t>.</a:t>
+            </a:r>
+            <a:br>
+              <a:rPr dirty="0"/>
+            </a:br>
+            <a:br>
+              <a:rPr dirty="0"/>
+            </a:br>
+            <a:r>
+              <a:rPr dirty="0"/>
               <a:t>• De API test direct:</a:t>
             </a:r>
-            <a:br/>
-            <a:r>
-              <a:t>   ✔️ Draait de code zonder errors?</a:t>
-            </a:r>
-            <a:br/>
-            <a:r>
-              <a:t>   ✔️ Krijg je 'call', 'raise' of 'fold' terug?</a:t>
-            </a:r>
-            <a:br/>
-            <a:r>
-              <a:t>   ✔️ Bevat de grafiek een titel en labels?</a:t>
-            </a:r>
-            <a:br/>
-            <a:br/>
-            <a:r>
-              <a:t>• ⏰ Deadline: Woensdag 13:40 uur.</a:t>
+            <a:br>
+              <a:rPr dirty="0"/>
+            </a:br>
+            <a:r>
+              <a:rPr dirty="0"/>
+              <a:t>   ✔️ </a:t>
+            </a:r>
+            <a:r>
+              <a:rPr dirty="0" err="1"/>
+              <a:t>Draait</a:t>
+            </a:r>
+            <a:r>
+              <a:rPr dirty="0"/>
+              <a:t> de code </a:t>
+            </a:r>
+            <a:r>
+              <a:rPr dirty="0" err="1"/>
+              <a:t>zonder</a:t>
+            </a:r>
+            <a:r>
+              <a:rPr dirty="0"/>
+              <a:t> errors?</a:t>
+            </a:r>
+            <a:br>
+              <a:rPr dirty="0"/>
+            </a:br>
+            <a:r>
+              <a:rPr dirty="0"/>
+              <a:t>   ✔️ </a:t>
+            </a:r>
+            <a:r>
+              <a:rPr dirty="0" err="1"/>
+              <a:t>Krijg</a:t>
+            </a:r>
+            <a:r>
+              <a:rPr dirty="0"/>
+              <a:t> je 'call', 'raise' of 'fold' </a:t>
+            </a:r>
+            <a:r>
+              <a:rPr dirty="0" err="1"/>
+              <a:t>terug</a:t>
+            </a:r>
+            <a:r>
+              <a:rPr dirty="0"/>
+              <a:t>?</a:t>
+            </a:r>
+            <a:br>
+              <a:rPr dirty="0"/>
+            </a:br>
+            <a:r>
+              <a:rPr dirty="0"/>
+              <a:t>   ✔️ </a:t>
+            </a:r>
+            <a:r>
+              <a:rPr dirty="0" err="1"/>
+              <a:t>Bevat</a:t>
+            </a:r>
+            <a:r>
+              <a:rPr dirty="0"/>
+              <a:t> de </a:t>
+            </a:r>
+            <a:r>
+              <a:rPr dirty="0" err="1"/>
+              <a:t>grafiek</a:t>
+            </a:r>
+            <a:r>
+              <a:rPr dirty="0"/>
+              <a:t> </a:t>
+            </a:r>
+            <a:r>
+              <a:rPr dirty="0" err="1"/>
+              <a:t>een</a:t>
+            </a:r>
+            <a:r>
+              <a:rPr dirty="0"/>
+              <a:t> </a:t>
+            </a:r>
+            <a:r>
+              <a:rPr dirty="0" err="1"/>
+              <a:t>titel</a:t>
+            </a:r>
+            <a:r>
+              <a:rPr dirty="0"/>
+              <a:t> </a:t>
+            </a:r>
+            <a:r>
+              <a:rPr dirty="0" err="1"/>
+              <a:t>en</a:t>
+            </a:r>
+            <a:r>
+              <a:rPr dirty="0"/>
+              <a:t> labels?</a:t>
+            </a:r>
+            <a:br>
+              <a:rPr dirty="0"/>
+            </a:br>
+            <a:br>
+              <a:rPr dirty="0"/>
+            </a:br>
+            <a:r>
+              <a:rPr dirty="0"/>
+              <a:t>• ⏰ Deadline: </a:t>
+            </a:r>
+            <a:r>
+              <a:rPr dirty="0" err="1"/>
+              <a:t>Woensdag</a:t>
+            </a:r>
+            <a:r>
+              <a:rPr dirty="0"/>
+              <a:t> 1</a:t>
+            </a:r>
+            <a:r>
+              <a:rPr lang="nl-NL" dirty="0"/>
+              <a:t>0</a:t>
+            </a:r>
+            <a:r>
+              <a:rPr dirty="0"/>
+              <a:t>:</a:t>
+            </a:r>
+            <a:r>
+              <a:rPr lang="nl-NL" dirty="0"/>
+              <a:t>0</a:t>
+            </a:r>
+            <a:r>
+              <a:rPr dirty="0"/>
+              <a:t>0 </a:t>
+            </a:r>
+            <a:r>
+              <a:rPr dirty="0" err="1"/>
+              <a:t>uur</a:t>
+            </a:r>
+            <a:r>
+              <a:rPr dirty="0"/>
+              <a:t>.</a:t>
             </a:r>
           </a:p>
         </p:txBody>
@@ -6081,7 +6418,7 @@
         </p:nvSpPr>
         <p:spPr>
           <a:xfrm>
-            <a:off x="0" y="0"/>
+            <a:off x="0" y="312234"/>
             <a:ext cx="12191695" cy="6858000"/>
           </a:xfrm>
           <a:prstGeom prst="rect">
@@ -6216,7 +6553,40 @@
               </a:defRPr>
             </a:pPr>
             <a:r>
-              <a:t>📋 Jouw Stappenplan voor nu in de klas:</a:t>
+              <a:rPr dirty="0"/>
+              <a:t>📋 </a:t>
+            </a:r>
+            <a:r>
+              <a:rPr dirty="0" err="1"/>
+              <a:t>Jouw</a:t>
+            </a:r>
+            <a:r>
+              <a:rPr dirty="0"/>
+              <a:t> </a:t>
+            </a:r>
+            <a:r>
+              <a:rPr dirty="0" err="1"/>
+              <a:t>Stappenplan</a:t>
+            </a:r>
+            <a:r>
+              <a:rPr dirty="0"/>
+              <a:t> </a:t>
+            </a:r>
+            <a:r>
+              <a:rPr dirty="0" err="1"/>
+              <a:t>voor</a:t>
+            </a:r>
+            <a:r>
+              <a:rPr dirty="0"/>
+              <a:t> nu in de </a:t>
+            </a:r>
+            <a:r>
+              <a:rPr dirty="0" err="1"/>
+              <a:t>klas</a:t>
+            </a:r>
+            <a:r>
+              <a:rPr dirty="0"/>
+              <a:t>:</a:t>
             </a:r>
           </a:p>
           <a:p>
@@ -6231,7 +6601,16 @@
               </a:defRPr>
             </a:pPr>
             <a:r>
-              <a:t>1.  Open het Jupyter Notebook `Week1_Pokerbot_Opdracht.ipynb` in je omgeving.</a:t>
+              <a:rPr dirty="0"/>
+              <a:t>1.  Open het Jupyter Notebook `Week1_Pokerbot_Opdracht.ipynb` in je </a:t>
+            </a:r>
+            <a:r>
+              <a:rPr dirty="0" err="1"/>
+              <a:t>omgeving</a:t>
+            </a:r>
+            <a:r>
+              <a:rPr dirty="0"/>
+              <a:t>.</a:t>
             </a:r>
           </a:p>
           <a:p>
@@ -6246,7 +6625,64 @@
               </a:defRPr>
             </a:pPr>
             <a:r>
-              <a:t>2.  Voer de simulatie-lus uit (10.000 trekkingen) en controleer of de data klopt.</a:t>
+              <a:rPr dirty="0"/>
+              <a:t>2.  </a:t>
+            </a:r>
+            <a:r>
+              <a:rPr dirty="0" err="1"/>
+              <a:t>Voer</a:t>
+            </a:r>
+            <a:r>
+              <a:rPr dirty="0"/>
+              <a:t> de </a:t>
+            </a:r>
+            <a:r>
+              <a:rPr dirty="0" err="1"/>
+              <a:t>simulatie-lus</a:t>
+            </a:r>
+            <a:r>
+              <a:rPr dirty="0"/>
+              <a:t> </a:t>
+            </a:r>
+            <a:r>
+              <a:rPr dirty="0" err="1"/>
+              <a:t>uit</a:t>
+            </a:r>
+            <a:r>
+              <a:rPr dirty="0"/>
+              <a:t> (10.000 </a:t>
+            </a:r>
+            <a:r>
+              <a:rPr dirty="0" err="1"/>
+              <a:t>trekkingen</a:t>
+            </a:r>
+            <a:r>
+              <a:rPr dirty="0"/>
+              <a:t>) </a:t>
+            </a:r>
+            <a:r>
+              <a:rPr dirty="0" err="1"/>
+              <a:t>en</a:t>
+            </a:r>
+            <a:r>
+              <a:rPr dirty="0"/>
+              <a:t> </a:t>
+            </a:r>
+            <a:r>
+              <a:rPr dirty="0" err="1"/>
+              <a:t>controleer</a:t>
+            </a:r>
+            <a:r>
+              <a:rPr dirty="0"/>
+              <a:t> of de data </a:t>
+            </a:r>
+            <a:r>
+              <a:rPr dirty="0" err="1"/>
+              <a:t>klopt</a:t>
+            </a:r>
+            <a:r>
+              <a:rPr dirty="0"/>
+              <a:t>.</a:t>
             </a:r>
           </a:p>
           <a:p>
@@ -6261,7 +6697,48 @@
               </a:defRPr>
             </a:pPr>
             <a:r>
-              <a:t>3.  Schrijf de `kies_actie(beide_kaarten)` functie voor Bot Versie 1.</a:t>
+              <a:rPr dirty="0"/>
+              <a:t>3.  </a:t>
+            </a:r>
+            <a:r>
+              <a:rPr dirty="0" err="1"/>
+              <a:t>Schrijf</a:t>
+            </a:r>
+            <a:r>
+              <a:rPr dirty="0"/>
+              <a:t> de `</a:t>
+            </a:r>
+            <a:r>
+              <a:rPr dirty="0" err="1"/>
+              <a:t>kies_actie</a:t>
+            </a:r>
+            <a:r>
+              <a:rPr dirty="0"/>
+              <a:t>(</a:t>
+            </a:r>
+            <a:r>
+              <a:rPr dirty="0" err="1"/>
+              <a:t>beide_kaarten</a:t>
+            </a:r>
+            <a:r>
+              <a:rPr dirty="0"/>
+              <a:t>)` </a:t>
+            </a:r>
+            <a:r>
+              <a:rPr dirty="0" err="1"/>
+              <a:t>functie</a:t>
+            </a:r>
+            <a:r>
+              <a:rPr dirty="0"/>
+              <a:t> </a:t>
+            </a:r>
+            <a:r>
+              <a:rPr dirty="0" err="1"/>
+              <a:t>voor</a:t>
+            </a:r>
+            <a:r>
+              <a:rPr dirty="0"/>
+              <a:t> Bot Versie 1.</a:t>
             </a:r>
           </a:p>
           <a:p>
@@ -6276,7 +6753,56 @@
               </a:defRPr>
             </a:pPr>
             <a:r>
-              <a:t>4.  Maak de Seaborn verdelingsplot met een duidelijke titel en accentkleur.</a:t>
+              <a:rPr dirty="0"/>
+              <a:t>4.  Maak de Seaborn </a:t>
+            </a:r>
+            <a:r>
+              <a:rPr dirty="0" err="1"/>
+              <a:t>verdelingsplot</a:t>
+            </a:r>
+            <a:r>
+              <a:rPr dirty="0"/>
+              <a:t> met </a:t>
+            </a:r>
+            <a:r>
+              <a:rPr dirty="0" err="1"/>
+              <a:t>een</a:t>
+            </a:r>
+            <a:r>
+              <a:rPr dirty="0"/>
+              <a:t> </a:t>
+            </a:r>
+            <a:r>
+              <a:rPr dirty="0" err="1"/>
+              <a:t>duidelijke</a:t>
+            </a:r>
+            <a:r>
+              <a:rPr dirty="0"/>
+              <a:t> </a:t>
+            </a:r>
+            <a:r>
+              <a:rPr dirty="0" err="1"/>
+              <a:t>titel</a:t>
+            </a:r>
+            <a:r>
+              <a:rPr dirty="0"/>
+              <a:t> </a:t>
+            </a:r>
+            <a:r>
+              <a:rPr dirty="0" err="1"/>
+              <a:t>en</a:t>
+            </a:r>
+            <a:r>
+              <a:rPr dirty="0"/>
+              <a:t> </a:t>
+            </a:r>
+            <a:r>
+              <a:rPr dirty="0" err="1"/>
+              <a:t>accentkleur</a:t>
+            </a:r>
+            <a:r>
+              <a:rPr dirty="0"/>
+              <a:t>.</a:t>
             </a:r>
           </a:p>
           <a:p>
@@ -6291,7 +6817,40 @@
               </a:defRPr>
             </a:pPr>
             <a:r>
-              <a:t>5.  Sla op als `mijn_bot_week1.py` en test de API-inlevercel onderaan.</a:t>
+              <a:rPr dirty="0"/>
+              <a:t>5.  Sla op </a:t>
+            </a:r>
+            <a:r>
+              <a:rPr dirty="0" err="1"/>
+              <a:t>als</a:t>
+            </a:r>
+            <a:r>
+              <a:rPr dirty="0"/>
+              <a:t> `mijn_bot_week1.py` </a:t>
+            </a:r>
+            <a:r>
+              <a:rPr dirty="0" err="1"/>
+              <a:t>en</a:t>
+            </a:r>
+            <a:r>
+              <a:rPr dirty="0"/>
+              <a:t> test de API-</a:t>
+            </a:r>
+            <a:r>
+              <a:rPr dirty="0" err="1"/>
+              <a:t>inlevercel</a:t>
+            </a:r>
+            <a:r>
+              <a:rPr dirty="0"/>
+              <a:t> </a:t>
+            </a:r>
+            <a:r>
+              <a:rPr dirty="0" err="1"/>
+              <a:t>onderaan</a:t>
+            </a:r>
+            <a:r>
+              <a:rPr dirty="0"/>
+              <a:t>.</a:t>
             </a:r>
           </a:p>
           <a:p>
@@ -6306,7 +6865,48 @@
               </a:defRPr>
             </a:pPr>
             <a:r>
-              <a:t>⏰ Deadline: Woensdag 13:40 uur  |  🙋 Hulp nodig? Steek je hand op!</a:t>
+              <a:rPr dirty="0"/>
+              <a:t>⏰ Deadline: </a:t>
+            </a:r>
+            <a:r>
+              <a:rPr dirty="0" err="1"/>
+              <a:t>Woensdag</a:t>
+            </a:r>
+            <a:r>
+              <a:rPr dirty="0"/>
+              <a:t> 1</a:t>
+            </a:r>
+            <a:r>
+              <a:rPr lang="nl-NL" dirty="0"/>
+              <a:t>0</a:t>
+            </a:r>
+            <a:r>
+              <a:rPr dirty="0"/>
+              <a:t>:</a:t>
+            </a:r>
+            <a:r>
+              <a:rPr lang="nl-NL" dirty="0"/>
+              <a:t>0</a:t>
+            </a:r>
+            <a:r>
+              <a:rPr dirty="0"/>
+              <a:t>0 </a:t>
+            </a:r>
+            <a:r>
+              <a:rPr dirty="0" err="1"/>
+              <a:t>uur</a:t>
+            </a:r>
+            <a:r>
+              <a:rPr dirty="0"/>
+              <a:t>  |  🙋 Hulp </a:t>
+            </a:r>
+            <a:r>
+              <a:rPr dirty="0" err="1"/>
+              <a:t>nodig</a:t>
+            </a:r>
+            <a:r>
+              <a:rPr dirty="0"/>
+              <a:t>? Steek je hand op!</a:t>
             </a:r>
           </a:p>
         </p:txBody>
